--- a/public/fun/pack/pptx/talkpro/발표템플릿프리미엄_09_모임·동호회소개_로제브론즈.pptx
+++ b/public/fun/pack/pptx/talkpro/발표템플릿프리미엄_09_모임·동호회소개_로제브론즈.pptx
@@ -115,12 +115,12 @@
   <p:extLst>
     <p:ext uri="{521415D9-36F7-43E2-AB2F-B90AF26B5E84}">
       <p14:sectionLst xmlns:p14="http://schemas.microsoft.com/office/powerpoint/2010/main">
-        <p14:section name="시작" id="{357B4761-4B5C-4641-8503-CE3962B31B03}">
+        <p14:section name="시작" id="{8BC37D10-FBEB-4E78-A5D1-848649DC7225}">
           <p14:sldIdLst>
             <p14:sldId id="256"/>
           </p14:sldIdLst>
         </p14:section>
-        <p14:section name="본문" id="{0C75E7F0-95D7-42B7-A42B-344F1F1B4082}">
+        <p14:section name="본문" id="{3D6E3073-C5B5-498E-9F78-FA11287B60D6}">
           <p14:sldIdLst>
             <p14:sldId id="257"/>
             <p14:sldId id="258"/>
@@ -131,7 +131,7 @@
             <p14:sldId id="263"/>
           </p14:sldIdLst>
         </p14:section>
-        <p14:section name="마무리" id="{98402870-5E2D-4804-BE8B-EEEE253CB86E}">
+        <p14:section name="마무리" id="{9B56B259-55D9-4E4D-9980-AAF2449EAD90}">
           <p14:sldIdLst>
             <p14:sldId id="264"/>
           </p14:sldIdLst>
@@ -1974,7 +1974,7 @@
             </a:lvl1pPr>
           </a:lstStyle>
           <a:p>
-            <a:fld id="{DD849747-B2A0-40CC-98FB-F2450FB17E9D}" type="slidenum">
+            <a:fld id="{6C07CC7A-DDC1-4A7F-81F6-F8707211F41F}" type="slidenum">
               <a:rPr lang="en-US"/>
               <a:t>‹#›</a:t>
             </a:fld>
@@ -3055,7 +3055,7 @@
             </a:lvl1pPr>
           </a:lstStyle>
           <a:p>
-            <a:fld id="{39F67124-8D15-43AA-986A-3F7EDD85D015}" type="slidenum">
+            <a:fld id="{D380050D-9D42-4C12-AC9A-402F9D63178D}" type="slidenum">
               <a:rPr lang="en-US"/>
               <a:t>‹#›</a:t>
             </a:fld>
@@ -4065,7 +4065,7 @@
             </a:lvl1pPr>
           </a:lstStyle>
           <a:p>
-            <a:fld id="{BE04613F-24B8-4233-9A90-D2EF0CACEF15}" type="slidenum">
+            <a:fld id="{59371525-C0B5-452E-AB90-78890F99BBF5}" type="slidenum">
               <a:rPr lang="en-US"/>
               <a:t>‹#›</a:t>
             </a:fld>
@@ -5234,7 +5234,7 @@
           <a:p>
             <a:r>
               <a:rPr lang="ko-KR"/>
-              <a:t>0000. 00. 00</a:t>
+              <a:t>날짜 입력</a:t>
             </a:r>
           </a:p>
         </p:txBody>
@@ -5319,7 +5319,7 @@
           <a:bodyPr/>
           <a:lstStyle/>
           <a:p>
-            <a:fld id="{C728B966-569C-4E7D-A907-4D899BB8F5A6}" type="slidenum">
+            <a:fld id="{6C976EC0-D71C-4FC3-AD61-D12E8F364D63}" type="slidenum">
               <a:rPr lang="en-US"/>
               <a:t>‹#›</a:t>
             </a:fld>
@@ -6421,7 +6421,7 @@
           <a:bodyPr/>
           <a:lstStyle/>
           <a:p>
-            <a:fld id="{773449D6-6E3C-4746-9B65-61032D217F4D}" type="slidenum">
+            <a:fld id="{541E6F25-67FF-43F3-8AD9-0909848D8635}" type="slidenum">
               <a:rPr lang="en-US"/>
               <a:t>‹#›</a:t>
             </a:fld>
@@ -6509,7 +6509,7 @@
           <a:bodyPr/>
           <a:lstStyle/>
           <a:p>
-            <a:fld id="{4FC9F1D0-F669-4C5E-9517-FC29517DF671}" type="slidenum">
+            <a:fld id="{37344A85-5306-4084-95CF-85DC89122C12}" type="slidenum">
               <a:rPr lang="en-US"/>
               <a:t>‹#›</a:t>
             </a:fld>
@@ -7407,7 +7407,7 @@
           <a:bodyPr/>
           <a:lstStyle/>
           <a:p>
-            <a:fld id="{ED1CD40C-1E98-42B3-AAA3-2E4FAF1DD970}" type="slidenum">
+            <a:fld id="{6F5512A4-D326-42CC-B0B1-D18152CF081C}" type="slidenum">
               <a:rPr lang="en-US"/>
               <a:t>‹#›</a:t>
             </a:fld>
@@ -8011,7 +8011,7 @@
           <a:bodyPr/>
           <a:lstStyle/>
           <a:p>
-            <a:fld id="{2CA2E0DE-FB26-4D8E-84D3-5CF3DDD06ADF}" type="slidenum">
+            <a:fld id="{4B2CFBAB-087E-4DE2-B290-96D83011593C}" type="slidenum">
               <a:rPr lang="en-US"/>
               <a:t>‹#›</a:t>
             </a:fld>
@@ -8194,7 +8194,7 @@
           <a:bodyPr/>
           <a:lstStyle/>
           <a:p>
-            <a:fld id="{3EFF7601-1B43-4CDA-AFB8-5ABD98587598}" type="slidenum">
+            <a:fld id="{67B629D1-832F-4DD4-B053-06A5314E0EBA}" type="slidenum">
               <a:rPr lang="en-US"/>
               <a:t>‹#›</a:t>
             </a:fld>
@@ -9258,7 +9258,7 @@
           <a:bodyPr/>
           <a:lstStyle/>
           <a:p>
-            <a:fld id="{03F86FC7-FB44-434D-965A-7C73BDA42618}" type="slidenum">
+            <a:fld id="{33BA0DD8-E148-464C-9320-00029C1FE215}" type="slidenum">
               <a:rPr lang="en-US"/>
               <a:t>‹#›</a:t>
             </a:fld>
